--- a/slides/opening.pptx
+++ b/slides/opening.pptx
@@ -16,6 +16,7 @@
     <p:sldId id="264" r:id="rId16"/>
     <p:sldId id="265" r:id="rId17"/>
     <p:sldId id="266" r:id="rId18"/>
+    <p:sldId id="267" r:id="rId19"/>
   </p:sldIdLst>
   <p:sldSz cx="12192000" cy="6858000" type="screen4x3"/>
   <p:notesSz cx="6858000" cy="9144000"/>
@@ -582,7 +583,7 @@
           <a:lstStyle/>
           <a:p>
             <a:r>
-              <a:t>Row 11, equity, is not taught as its own session. Mention it at the close and ask groups whether their paper says anything about who gains. Most will not.</a:t>
+              <a:t>Say the shape of the day out loud: the morning takes an ICER apart and builds one, and only after lunch do we ask what it is worth. Row 11, equity, is not taught as its own session. Mention it at the close and ask groups whether their paper says anything about who gains. Most will not.</a:t>
             </a:r>
           </a:p>
         </p:txBody>
@@ -652,7 +653,77 @@
           <a:lstStyle/>
           <a:p>
             <a:r>
-              <a:t>Not for reading out. HTAIn's process is described, with sources, in Block 2.</a:t>
+              <a:t>Say this explicitly, because it is the commonest objection in the room: "that is public health, I prescribe". The programme example is used to teach because it is the cleanest published Indian case with all the moving parts. The clinical example is there to prove the transfer. Name the eight papers if you have the pack in front of you.</a:t>
+            </a:r>
+          </a:p>
+        </p:txBody>
+      </p:sp>
+      <p:sp>
+        <p:nvSpPr>
+          <p:cNvPr id="4" name="Slide Number Placeholder 3"/>
+          <p:cNvSpPr>
+            <a:spLocks noGrp="1"/>
+          </p:cNvSpPr>
+          <p:nvPr>
+            <p:ph type="sldNum" idx="5" sz="quarter"/>
+          </p:nvPr>
+        </p:nvSpPr>
+        <p:spPr/>
+      </p:sp>
+    </p:spTree>
+  </p:cSld>
+  <p:clrMapOvr>
+    <a:masterClrMapping/>
+  </p:clrMapOvr>
+</p:notes>
+</file>
+
+<file path=ppt/notesSlides/notesSlide12.xml><?xml version="1.0" encoding="utf-8"?>
+<p:notes xmlns:a="http://schemas.openxmlformats.org/drawingml/2006/main" xmlns:p="http://schemas.openxmlformats.org/presentationml/2006/main" xmlns:r="http://schemas.openxmlformats.org/officeDocument/2006/relationships">
+  <p:cSld>
+    <p:spTree>
+      <p:nvGrpSpPr>
+        <p:cNvPr id="1" name=""/>
+        <p:cNvGrpSpPr/>
+        <p:nvPr/>
+      </p:nvGrpSpPr>
+      <p:grpSpPr>
+        <a:xfrm>
+          <a:off x="0" y="0"/>
+          <a:ext cx="0" cy="0"/>
+          <a:chOff x="0" y="0"/>
+          <a:chExt cx="0" cy="0"/>
+        </a:xfrm>
+      </p:grpSpPr>
+      <p:sp>
+        <p:nvSpPr>
+          <p:cNvPr id="2" name="Slide Image Placeholder 1"/>
+          <p:cNvSpPr>
+            <a:spLocks noGrp="1"/>
+          </p:cNvSpPr>
+          <p:nvPr>
+            <p:ph type="sldImg" idx="2"/>
+          </p:nvPr>
+        </p:nvSpPr>
+        <p:spPr/>
+      </p:sp>
+      <p:sp>
+        <p:nvSpPr>
+          <p:cNvPr id="3" name="Notes Placeholder 2"/>
+          <p:cNvSpPr>
+            <a:spLocks noGrp="1"/>
+          </p:cNvSpPr>
+          <p:nvPr>
+            <p:ph type="body" idx="3" sz="quarter"/>
+          </p:nvPr>
+        </p:nvSpPr>
+        <p:spPr/>
+        <p:txBody>
+          <a:bodyPr/>
+          <a:lstStyle/>
+          <a:p>
+            <a:r>
+              <a:t>Not for reading out. HTAIn's process is described, with sources, in Session 6.</a:t>
             </a:r>
           </a:p>
         </p:txBody>
@@ -862,7 +933,7 @@
           <a:lstStyle/>
           <a:p>
             <a:r>
-              <a:t>Keep this to two minutes; Session 3 has the committees and the flow in detail. The point for now: HTAIn advises, it does not command. And topic selection is where much of the real influence lies: what nobody nominates, nobody evaluates.</a:t>
+              <a:t>Keep this to two minutes; Session 6 has the committees and the flow in detail. The point for now: HTAIn advises, it does not command. And topic selection is where much of the real influence lies: what nobody nominates, nobody evaluates.</a:t>
             </a:r>
           </a:p>
         </p:txBody>
@@ -1072,7 +1143,7 @@
           <a:lstStyle/>
           <a:p>
             <a:r>
-              <a:t>These figures reappear in Session 3 when we discuss league tables; there you can move quickly. The message here is permission: they are allowed to disagree with a published paper, and should.</a:t>
+              <a:t>These figures reappear in Session 6 when we discuss league tables; there you can move quickly. The message here is permission: they are allowed to disagree with a published paper, and should.</a:t>
             </a:r>
           </a:p>
         </p:txBody>
@@ -4727,7 +4798,7 @@
                           </a:solidFill>
                           <a:latin typeface="Arial"/>
                         </a:rPr>
-                        <a:t>Thresholds, opportunity cost, budget impact</a:t>
+                        <a:t>Framing the question</a:t>
                       </a:r>
                     </a:p>
                   </a:txBody>
@@ -4752,7 +4823,7 @@
                           </a:solidFill>
                           <a:latin typeface="Arial"/>
                         </a:rPr>
-                        <a:t>the verdict's yardstick</a:t>
+                        <a:t>1, 2, 3, 7</a:t>
                       </a:r>
                     </a:p>
                   </a:txBody>
@@ -4887,7 +4958,7 @@
                           </a:solidFill>
                           <a:latin typeface="Arial"/>
                         </a:rPr>
-                        <a:t>Framing the question</a:t>
+                        <a:t>Outcomes, discounting and the ICER</a:t>
                       </a:r>
                     </a:p>
                   </a:txBody>
@@ -4912,7 +4983,7 @@
                           </a:solidFill>
                           <a:latin typeface="Arial"/>
                         </a:rPr>
-                        <a:t>1, 2, 3, 7</a:t>
+                        <a:t>6, 8, 12</a:t>
                       </a:r>
                     </a:p>
                   </a:txBody>
@@ -4966,7 +5037,7 @@
                           </a:solidFill>
                           <a:latin typeface="Arial"/>
                         </a:rPr>
-                        <a:t>Outcomes, discounting and the ICER</a:t>
+                        <a:t>Thresholds, opportunity cost, budget impact</a:t>
                       </a:r>
                     </a:p>
                   </a:txBody>
@@ -4993,7 +5064,7 @@
                           </a:solidFill>
                           <a:latin typeface="Arial"/>
                         </a:rPr>
-                        <a:t>6, 8, 12</a:t>
+                        <a:t>the verdict's yardstick</a:t>
                       </a:r>
                     </a:p>
                   </a:txBody>
@@ -5254,6 +5325,711 @@
 </file>
 
 <file path=ppt/slides/slide11.xml><?xml version="1.0" encoding="utf-8"?>
+<p:sld xmlns:a="http://schemas.openxmlformats.org/drawingml/2006/main" xmlns:p="http://schemas.openxmlformats.org/presentationml/2006/main" xmlns:r="http://schemas.openxmlformats.org/officeDocument/2006/relationships">
+  <p:cSld>
+    <p:spTree>
+      <p:nvGrpSpPr>
+        <p:cNvPr id="1" name=""/>
+        <p:cNvGrpSpPr/>
+        <p:nvPr/>
+      </p:nvGrpSpPr>
+      <p:grpSpPr/>
+      <p:sp>
+        <p:nvSpPr>
+          <p:cNvPr id="2" name="Rectangle 1"/>
+          <p:cNvSpPr/>
+          <p:nvPr/>
+        </p:nvSpPr>
+        <p:spPr>
+          <a:xfrm>
+            <a:off x="0" y="0"/>
+            <a:ext cx="12192000" cy="876300"/>
+          </a:xfrm>
+          <a:prstGeom prst="rect">
+            <a:avLst/>
+          </a:prstGeom>
+          <a:solidFill>
+            <a:srgbClr val="162A6C"/>
+          </a:solidFill>
+          <a:ln>
+            <a:noFill/>
+          </a:ln>
+          <a:effectLst/>
+        </p:spPr>
+        <p:style>
+          <a:lnRef idx="1">
+            <a:schemeClr val="accent1"/>
+          </a:lnRef>
+          <a:fillRef idx="3">
+            <a:schemeClr val="accent1"/>
+          </a:fillRef>
+          <a:effectRef idx="2">
+            <a:schemeClr val="accent1"/>
+          </a:effectRef>
+          <a:fontRef idx="minor">
+            <a:schemeClr val="lt1"/>
+          </a:fontRef>
+        </p:style>
+        <p:txBody>
+          <a:bodyPr rtlCol="0" anchor="ctr"/>
+          <a:lstStyle/>
+          <a:p>
+            <a:pPr algn="ctr"/>
+          </a:p>
+        </p:txBody>
+      </p:sp>
+      <p:sp>
+        <p:nvSpPr>
+          <p:cNvPr id="3" name="TextBox 2"/>
+          <p:cNvSpPr txBox="1"/>
+          <p:nvPr/>
+        </p:nvSpPr>
+        <p:spPr>
+          <a:xfrm>
+            <a:off x="552450" y="0"/>
+            <a:ext cx="11087100" cy="876300"/>
+          </a:xfrm>
+          <a:prstGeom prst="rect">
+            <a:avLst/>
+          </a:prstGeom>
+          <a:noFill/>
+        </p:spPr>
+        <p:txBody>
+          <a:bodyPr wrap="square" lIns="0" rIns="0" tIns="0" bIns="0" anchor="ctr">
+            <a:spAutoFit/>
+          </a:bodyPr>
+          <a:lstStyle/>
+          <a:p>
+            <a:pPr algn="l">
+              <a:lnSpc>
+                <a:spcPct val="93300"/>
+              </a:lnSpc>
+              <a:spcAft>
+                <a:spcPts val="0"/>
+              </a:spcAft>
+              <a:buNone/>
+            </a:pPr>
+            <a:r>
+              <a:rPr sz="3000" b="1" i="0" spc="-15">
+                <a:solidFill>
+                  <a:srgbClr val="FFFFFF"/>
+                </a:solidFill>
+                <a:latin typeface="Arial"/>
+              </a:rPr>
+              <a:t>Two examples, side by side, all day</a:t>
+            </a:r>
+          </a:p>
+        </p:txBody>
+      </p:sp>
+      <p:sp>
+        <p:nvSpPr>
+          <p:cNvPr id="4" name="Rectangle 3"/>
+          <p:cNvSpPr/>
+          <p:nvPr/>
+        </p:nvSpPr>
+        <p:spPr>
+          <a:xfrm>
+            <a:off x="552450" y="1162050"/>
+            <a:ext cx="5463629" cy="2676079"/>
+          </a:xfrm>
+          <a:prstGeom prst="rect">
+            <a:avLst/>
+          </a:prstGeom>
+          <a:solidFill>
+            <a:srgbClr val="F4F6F9"/>
+          </a:solidFill>
+          <a:ln w="9525">
+            <a:solidFill>
+              <a:srgbClr val="CCD4DD"/>
+            </a:solidFill>
+          </a:ln>
+          <a:effectLst/>
+        </p:spPr>
+        <p:style>
+          <a:lnRef idx="1">
+            <a:schemeClr val="accent1"/>
+          </a:lnRef>
+          <a:fillRef idx="3">
+            <a:schemeClr val="accent1"/>
+          </a:fillRef>
+          <a:effectRef idx="2">
+            <a:schemeClr val="accent1"/>
+          </a:effectRef>
+          <a:fontRef idx="minor">
+            <a:schemeClr val="lt1"/>
+          </a:fontRef>
+        </p:style>
+        <p:txBody>
+          <a:bodyPr rtlCol="0" anchor="ctr"/>
+          <a:lstStyle/>
+          <a:p>
+            <a:pPr algn="ctr"/>
+          </a:p>
+        </p:txBody>
+      </p:sp>
+      <p:sp>
+        <p:nvSpPr>
+          <p:cNvPr id="5" name="Rectangle 4"/>
+          <p:cNvSpPr/>
+          <p:nvPr/>
+        </p:nvSpPr>
+        <p:spPr>
+          <a:xfrm>
+            <a:off x="552450" y="1162050"/>
+            <a:ext cx="38100" cy="2676079"/>
+          </a:xfrm>
+          <a:prstGeom prst="rect">
+            <a:avLst/>
+          </a:prstGeom>
+          <a:solidFill>
+            <a:srgbClr val="162A6C"/>
+          </a:solidFill>
+          <a:ln>
+            <a:noFill/>
+          </a:ln>
+          <a:effectLst/>
+        </p:spPr>
+        <p:style>
+          <a:lnRef idx="1">
+            <a:schemeClr val="accent1"/>
+          </a:lnRef>
+          <a:fillRef idx="3">
+            <a:schemeClr val="accent1"/>
+          </a:fillRef>
+          <a:effectRef idx="2">
+            <a:schemeClr val="accent1"/>
+          </a:effectRef>
+          <a:fontRef idx="minor">
+            <a:schemeClr val="lt1"/>
+          </a:fontRef>
+        </p:style>
+        <p:txBody>
+          <a:bodyPr rtlCol="0" anchor="ctr"/>
+          <a:lstStyle/>
+          <a:p>
+            <a:pPr algn="ctr"/>
+          </a:p>
+        </p:txBody>
+      </p:sp>
+      <p:sp>
+        <p:nvSpPr>
+          <p:cNvPr id="6" name="TextBox 5"/>
+          <p:cNvSpPr txBox="1"/>
+          <p:nvPr/>
+        </p:nvSpPr>
+        <p:spPr>
+          <a:xfrm>
+            <a:off x="803672" y="1311416"/>
+            <a:ext cx="4989761" cy="294829"/>
+          </a:xfrm>
+          <a:prstGeom prst="rect">
+            <a:avLst/>
+          </a:prstGeom>
+          <a:noFill/>
+        </p:spPr>
+        <p:txBody>
+          <a:bodyPr wrap="square" lIns="0" rIns="0" tIns="0" bIns="0">
+            <a:spAutoFit/>
+          </a:bodyPr>
+          <a:lstStyle/>
+          <a:p>
+            <a:pPr algn="l">
+              <a:lnSpc>
+                <a:spcPct val="83300"/>
+              </a:lnSpc>
+              <a:spcAft>
+                <a:spcPts val="0"/>
+              </a:spcAft>
+              <a:buNone/>
+            </a:pPr>
+            <a:r>
+              <a:rPr sz="2320" b="1" i="0" spc="-23">
+                <a:solidFill>
+                  <a:srgbClr val="1B3E8F"/>
+                </a:solidFill>
+                <a:latin typeface="Arial"/>
+              </a:rPr>
+              <a:t>The teaching example</a:t>
+            </a:r>
+          </a:p>
+        </p:txBody>
+      </p:sp>
+      <p:sp>
+        <p:nvSpPr>
+          <p:cNvPr id="7" name="TextBox 6"/>
+          <p:cNvSpPr txBox="1"/>
+          <p:nvPr/>
+        </p:nvSpPr>
+        <p:spPr>
+          <a:xfrm>
+            <a:off x="803672" y="1694649"/>
+            <a:ext cx="4989761" cy="1563291"/>
+          </a:xfrm>
+          <a:prstGeom prst="rect">
+            <a:avLst/>
+          </a:prstGeom>
+          <a:noFill/>
+        </p:spPr>
+        <p:txBody>
+          <a:bodyPr wrap="square" lIns="0" rIns="0" tIns="0" bIns="0">
+            <a:spAutoFit/>
+          </a:bodyPr>
+          <a:lstStyle/>
+          <a:p>
+            <a:pPr algn="l">
+              <a:lnSpc>
+                <a:spcPct val="116700"/>
+              </a:lnSpc>
+              <a:spcAft>
+                <a:spcPts val="400"/>
+              </a:spcAft>
+              <a:buNone/>
+            </a:pPr>
+            <a:r>
+              <a:rPr sz="2200" b="0" i="0">
+                <a:solidFill>
+                  <a:srgbClr val="10141A"/>
+                </a:solidFill>
+                <a:latin typeface="Arial"/>
+              </a:rPr>
+              <a:t>Cervical cancer screening against HPV vaccination. A </a:t>
+            </a:r>
+            <a:r>
+              <a:rPr sz="2200" b="1" i="0">
+                <a:solidFill>
+                  <a:srgbClr val="10141A"/>
+                </a:solidFill>
+                <a:latin typeface="Arial"/>
+              </a:rPr>
+              <a:t>programme</a:t>
+            </a:r>
+            <a:r>
+              <a:rPr sz="2200" b="0" i="0">
+                <a:solidFill>
+                  <a:srgbClr val="10141A"/>
+                </a:solidFill>
+                <a:latin typeface="Arial"/>
+              </a:rPr>
+              <a:t>, for a population, decided by a ministry.</a:t>
+            </a:r>
+          </a:p>
+          <a:p>
+            <a:pPr algn="l">
+              <a:lnSpc>
+                <a:spcPct val="116700"/>
+              </a:lnSpc>
+              <a:spcAft>
+                <a:spcPts val="400"/>
+              </a:spcAft>
+              <a:buNone/>
+            </a:pPr>
+            <a:r>
+              <a:rPr sz="2200" b="0" i="0">
+                <a:solidFill>
+                  <a:srgbClr val="75808D"/>
+                </a:solidFill>
+                <a:latin typeface="Arial"/>
+              </a:rPr>
+              <a:t>Chauhan, Prinja et al., 2020</a:t>
+            </a:r>
+          </a:p>
+        </p:txBody>
+      </p:sp>
+      <p:sp>
+        <p:nvSpPr>
+          <p:cNvPr id="8" name="Rectangle 7"/>
+          <p:cNvSpPr/>
+          <p:nvPr/>
+        </p:nvSpPr>
+        <p:spPr>
+          <a:xfrm>
+            <a:off x="6175921" y="1162050"/>
+            <a:ext cx="5463629" cy="2676079"/>
+          </a:xfrm>
+          <a:prstGeom prst="rect">
+            <a:avLst/>
+          </a:prstGeom>
+          <a:solidFill>
+            <a:srgbClr val="F4F6F9"/>
+          </a:solidFill>
+          <a:ln w="9525">
+            <a:solidFill>
+              <a:srgbClr val="CCD4DD"/>
+            </a:solidFill>
+          </a:ln>
+          <a:effectLst/>
+        </p:spPr>
+        <p:style>
+          <a:lnRef idx="1">
+            <a:schemeClr val="accent1"/>
+          </a:lnRef>
+          <a:fillRef idx="3">
+            <a:schemeClr val="accent1"/>
+          </a:fillRef>
+          <a:effectRef idx="2">
+            <a:schemeClr val="accent1"/>
+          </a:effectRef>
+          <a:fontRef idx="minor">
+            <a:schemeClr val="lt1"/>
+          </a:fontRef>
+        </p:style>
+        <p:txBody>
+          <a:bodyPr rtlCol="0" anchor="ctr"/>
+          <a:lstStyle/>
+          <a:p>
+            <a:pPr algn="ctr"/>
+          </a:p>
+        </p:txBody>
+      </p:sp>
+      <p:sp>
+        <p:nvSpPr>
+          <p:cNvPr id="9" name="Rectangle 8"/>
+          <p:cNvSpPr/>
+          <p:nvPr/>
+        </p:nvSpPr>
+        <p:spPr>
+          <a:xfrm>
+            <a:off x="6175921" y="1162050"/>
+            <a:ext cx="38100" cy="2676079"/>
+          </a:xfrm>
+          <a:prstGeom prst="rect">
+            <a:avLst/>
+          </a:prstGeom>
+          <a:solidFill>
+            <a:srgbClr val="162A6C"/>
+          </a:solidFill>
+          <a:ln>
+            <a:noFill/>
+          </a:ln>
+          <a:effectLst/>
+        </p:spPr>
+        <p:style>
+          <a:lnRef idx="1">
+            <a:schemeClr val="accent1"/>
+          </a:lnRef>
+          <a:fillRef idx="3">
+            <a:schemeClr val="accent1"/>
+          </a:fillRef>
+          <a:effectRef idx="2">
+            <a:schemeClr val="accent1"/>
+          </a:effectRef>
+          <a:fontRef idx="minor">
+            <a:schemeClr val="lt1"/>
+          </a:fontRef>
+        </p:style>
+        <p:txBody>
+          <a:bodyPr rtlCol="0" anchor="ctr"/>
+          <a:lstStyle/>
+          <a:p>
+            <a:pPr algn="ctr"/>
+          </a:p>
+        </p:txBody>
+      </p:sp>
+      <p:sp>
+        <p:nvSpPr>
+          <p:cNvPr id="10" name="TextBox 9"/>
+          <p:cNvSpPr txBox="1"/>
+          <p:nvPr/>
+        </p:nvSpPr>
+        <p:spPr>
+          <a:xfrm>
+            <a:off x="6427143" y="1311416"/>
+            <a:ext cx="4989761" cy="294829"/>
+          </a:xfrm>
+          <a:prstGeom prst="rect">
+            <a:avLst/>
+          </a:prstGeom>
+          <a:noFill/>
+        </p:spPr>
+        <p:txBody>
+          <a:bodyPr wrap="square" lIns="0" rIns="0" tIns="0" bIns="0">
+            <a:spAutoFit/>
+          </a:bodyPr>
+          <a:lstStyle/>
+          <a:p>
+            <a:pPr algn="l">
+              <a:lnSpc>
+                <a:spcPct val="83300"/>
+              </a:lnSpc>
+              <a:spcAft>
+                <a:spcPts val="0"/>
+              </a:spcAft>
+              <a:buNone/>
+            </a:pPr>
+            <a:r>
+              <a:rPr sz="2320" b="1" i="0" spc="-23">
+                <a:solidFill>
+                  <a:srgbClr val="1B3E8F"/>
+                </a:solidFill>
+                <a:latin typeface="Arial"/>
+              </a:rPr>
+              <a:t>The clinical example</a:t>
+            </a:r>
+          </a:p>
+        </p:txBody>
+      </p:sp>
+      <p:sp>
+        <p:nvSpPr>
+          <p:cNvPr id="11" name="TextBox 10"/>
+          <p:cNvSpPr txBox="1"/>
+          <p:nvPr/>
+        </p:nvSpPr>
+        <p:spPr>
+          <a:xfrm>
+            <a:off x="6427143" y="1694649"/>
+            <a:ext cx="4989761" cy="1954113"/>
+          </a:xfrm>
+          <a:prstGeom prst="rect">
+            <a:avLst/>
+          </a:prstGeom>
+          <a:noFill/>
+        </p:spPr>
+        <p:txBody>
+          <a:bodyPr wrap="square" lIns="0" rIns="0" tIns="0" bIns="0">
+            <a:spAutoFit/>
+          </a:bodyPr>
+          <a:lstStyle/>
+          <a:p>
+            <a:pPr algn="l">
+              <a:lnSpc>
+                <a:spcPct val="116700"/>
+              </a:lnSpc>
+              <a:spcAft>
+                <a:spcPts val="400"/>
+              </a:spcAft>
+              <a:buNone/>
+            </a:pPr>
+            <a:r>
+              <a:rPr sz="2200" b="0" i="0">
+                <a:solidFill>
+                  <a:srgbClr val="10141A"/>
+                </a:solidFill>
+                <a:latin typeface="Arial"/>
+              </a:rPr>
+              <a:t>Adjuvant trastuzumab against chemotherapy alone in breast cancer. A </a:t>
+            </a:r>
+            <a:r>
+              <a:rPr sz="2200" b="1" i="0">
+                <a:solidFill>
+                  <a:srgbClr val="10141A"/>
+                </a:solidFill>
+                <a:latin typeface="Arial"/>
+              </a:rPr>
+              <a:t>prescription</a:t>
+            </a:r>
+            <a:r>
+              <a:rPr sz="2200" b="0" i="0">
+                <a:solidFill>
+                  <a:srgbClr val="10141A"/>
+                </a:solidFill>
+                <a:latin typeface="Arial"/>
+              </a:rPr>
+              <a:t>, for one patient, decided in a clinic.</a:t>
+            </a:r>
+          </a:p>
+          <a:p>
+            <a:pPr algn="l">
+              <a:lnSpc>
+                <a:spcPct val="116700"/>
+              </a:lnSpc>
+              <a:spcAft>
+                <a:spcPts val="400"/>
+              </a:spcAft>
+              <a:buNone/>
+            </a:pPr>
+            <a:r>
+              <a:rPr sz="2200" b="0" i="0">
+                <a:solidFill>
+                  <a:srgbClr val="75808D"/>
+                </a:solidFill>
+                <a:latin typeface="Arial"/>
+              </a:rPr>
+              <a:t>Gupta, Verma, Gupta, Prinja, 2020</a:t>
+            </a:r>
+          </a:p>
+        </p:txBody>
+      </p:sp>
+      <p:sp>
+        <p:nvSpPr>
+          <p:cNvPr id="12" name="Rectangle 11"/>
+          <p:cNvSpPr/>
+          <p:nvPr/>
+        </p:nvSpPr>
+        <p:spPr>
+          <a:xfrm>
+            <a:off x="552450" y="3919389"/>
+            <a:ext cx="11087100" cy="1032867"/>
+          </a:xfrm>
+          <a:prstGeom prst="rect">
+            <a:avLst/>
+          </a:prstGeom>
+          <a:noFill/>
+          <a:ln>
+            <a:noFill/>
+          </a:ln>
+          <a:effectLst/>
+        </p:spPr>
+        <p:style>
+          <a:lnRef idx="1">
+            <a:schemeClr val="accent1"/>
+          </a:lnRef>
+          <a:fillRef idx="3">
+            <a:schemeClr val="accent1"/>
+          </a:fillRef>
+          <a:effectRef idx="2">
+            <a:schemeClr val="accent1"/>
+          </a:effectRef>
+          <a:fontRef idx="minor">
+            <a:schemeClr val="lt1"/>
+          </a:fontRef>
+        </p:style>
+        <p:txBody>
+          <a:bodyPr rtlCol="0" anchor="ctr"/>
+          <a:lstStyle/>
+          <a:p>
+            <a:pPr algn="ctr"/>
+          </a:p>
+        </p:txBody>
+      </p:sp>
+      <p:sp>
+        <p:nvSpPr>
+          <p:cNvPr id="13" name="Rectangle 12"/>
+          <p:cNvSpPr/>
+          <p:nvPr/>
+        </p:nvSpPr>
+        <p:spPr>
+          <a:xfrm>
+            <a:off x="552450" y="3919389"/>
+            <a:ext cx="57150" cy="1032867"/>
+          </a:xfrm>
+          <a:prstGeom prst="rect">
+            <a:avLst/>
+          </a:prstGeom>
+          <a:solidFill>
+            <a:srgbClr val="17683C"/>
+          </a:solidFill>
+          <a:ln>
+            <a:noFill/>
+          </a:ln>
+          <a:effectLst/>
+        </p:spPr>
+        <p:style>
+          <a:lnRef idx="1">
+            <a:schemeClr val="accent1"/>
+          </a:lnRef>
+          <a:fillRef idx="3">
+            <a:schemeClr val="accent1"/>
+          </a:fillRef>
+          <a:effectRef idx="2">
+            <a:schemeClr val="accent1"/>
+          </a:effectRef>
+          <a:fontRef idx="minor">
+            <a:schemeClr val="lt1"/>
+          </a:fontRef>
+        </p:style>
+        <p:txBody>
+          <a:bodyPr rtlCol="0" anchor="ctr"/>
+          <a:lstStyle/>
+          <a:p>
+            <a:pPr algn="ctr"/>
+          </a:p>
+        </p:txBody>
+      </p:sp>
+      <p:sp>
+        <p:nvSpPr>
+          <p:cNvPr id="14" name="TextBox 13"/>
+          <p:cNvSpPr txBox="1"/>
+          <p:nvPr/>
+        </p:nvSpPr>
+        <p:spPr>
+          <a:xfrm>
+            <a:off x="776189" y="3919729"/>
+            <a:ext cx="10863361" cy="1012527"/>
+          </a:xfrm>
+          <a:prstGeom prst="rect">
+            <a:avLst/>
+          </a:prstGeom>
+          <a:noFill/>
+        </p:spPr>
+        <p:txBody>
+          <a:bodyPr wrap="square" lIns="0" rIns="0" tIns="0" bIns="0">
+            <a:spAutoFit/>
+          </a:bodyPr>
+          <a:lstStyle/>
+          <a:p>
+            <a:pPr algn="l">
+              <a:lnSpc>
+                <a:spcPct val="101700"/>
+              </a:lnSpc>
+              <a:spcAft>
+                <a:spcPts val="0"/>
+              </a:spcAft>
+              <a:buNone/>
+            </a:pPr>
+            <a:r>
+              <a:rPr sz="3200" b="1" i="0" spc="-32">
+                <a:solidFill>
+                  <a:srgbClr val="10141A"/>
+                </a:solidFill>
+                <a:latin typeface="Arial"/>
+              </a:rPr>
+              <a:t>The method does not change with the size of the decision.</a:t>
+            </a:r>
+          </a:p>
+        </p:txBody>
+      </p:sp>
+      <p:sp>
+        <p:nvSpPr>
+          <p:cNvPr id="15" name="TextBox 14"/>
+          <p:cNvSpPr txBox="1"/>
+          <p:nvPr/>
+        </p:nvSpPr>
+        <p:spPr>
+          <a:xfrm>
+            <a:off x="552450" y="4972886"/>
+            <a:ext cx="11087100" cy="1563291"/>
+          </a:xfrm>
+          <a:prstGeom prst="rect">
+            <a:avLst/>
+          </a:prstGeom>
+          <a:noFill/>
+        </p:spPr>
+        <p:txBody>
+          <a:bodyPr wrap="square" lIns="0" rIns="0" tIns="0" bIns="0">
+            <a:spAutoFit/>
+          </a:bodyPr>
+          <a:lstStyle/>
+          <a:p>
+            <a:pPr algn="l">
+              <a:lnSpc>
+                <a:spcPct val="116700"/>
+              </a:lnSpc>
+              <a:spcAft>
+                <a:spcPts val="0"/>
+              </a:spcAft>
+              <a:buNone/>
+            </a:pPr>
+            <a:r>
+              <a:rPr sz="2200" b="0" i="0">
+                <a:solidFill>
+                  <a:srgbClr val="47525F"/>
+                </a:solidFill>
+                <a:latin typeface="Arial"/>
+              </a:rPr>
+              <a:t>Seven of the eight papers in this room are clinical or service decisions: a biopsy, a mesh, a valve, kangaroo care, ward ventilation, dialysis, leukaemia. Sessions 2, 3 and 5 each close by running that session's principle on the trastuzumab paper, before you do it on yours.</a:t>
+            </a:r>
+          </a:p>
+        </p:txBody>
+      </p:sp>
+    </p:spTree>
+  </p:cSld>
+  <p:clrMapOvr>
+    <a:masterClrMapping/>
+  </p:clrMapOvr>
+</p:sld>
+</file>
+
+<file path=ppt/slides/slide12.xml><?xml version="1.0" encoding="utf-8"?>
 <p:sld xmlns:a="http://schemas.openxmlformats.org/drawingml/2006/main" xmlns:p="http://schemas.openxmlformats.org/presentationml/2006/main" xmlns:r="http://schemas.openxmlformats.org/officeDocument/2006/relationships">
   <p:cSld>
     <p:spTree>

--- a/slides/opening.pptx
+++ b/slides/opening.pptx
@@ -1143,7 +1143,7 @@
           <a:lstStyle/>
           <a:p>
             <a:r>
-              <a:t>These figures reappear in Session 6 when we discuss league tables; there you can move quickly. The message here is permission: they are allowed to disagree with a published paper, and should.</a:t>
+              <a:t>The title is the message; the table is only the evidence for it. Read the four rows quickly and spend the time on the claim line. These figures reappear in Session 6 when we discuss league tables. What this slide is really giving is permission: they are allowed to disagree with a published paper, and by this evening they should be able to say exactly which choice they disagree with.</a:t>
             </a:r>
           </a:p>
         </p:txBody>
@@ -9337,7 +9337,7 @@
                 </a:solidFill>
                 <a:latin typeface="Arial"/>
               </a:rPr>
-              <a:t>The published record is uneven</a:t>
+              <a:t>Publication is not a quality mark</a:t>
             </a:r>
           </a:p>
         </p:txBody>
@@ -9764,7 +9764,7 @@
                 </a:solidFill>
                 <a:latin typeface="Arial"/>
               </a:rPr>
-              <a:t>Publication is not a quality mark. Your paper today may be strong or weak. Finding out is the exercise.</a:t>
+              <a:t>Your paper today may be strong or weak. Finding out is the exercise, and you are allowed to say so out loud.</a:t>
             </a:r>
           </a:p>
         </p:txBody>
